--- a/GroundTruth/LighterColors_GroundTruthA.pptx
+++ b/GroundTruth/LighterColors_GroundTruthA.pptx
@@ -4150,10 +4150,7 @@
                   <a:prstDash val="solid"/>
                 </a:ln>
                 <a:solidFill>
-                  <a:schemeClr val="accent6">
-                    <a:lumMod val="40000"/>
-                    <a:lumOff val="60000"/>
-                  </a:schemeClr>
+                  <a:srgbClr val="000000"/>
                 </a:solidFill>
                 <a:effectLst>
                   <a:innerShdw blurRad="177800">
@@ -4208,10 +4205,7 @@
                   <a:prstDash val="solid"/>
                 </a:ln>
                 <a:solidFill>
-                  <a:schemeClr val="accent2">
-                    <a:lumMod val="60000"/>
-                    <a:lumOff val="40000"/>
-                  </a:schemeClr>
+                  <a:srgbClr val="000000"/>
                 </a:solidFill>
                 <a:effectLst>
                   <a:innerShdw blurRad="177800">
